--- a/docs/screenshots/xlsx2md-ogp.pptx
+++ b/docs/screenshots/xlsx2md-ogp.pptx
@@ -198,7 +198,7 @@
           <a:p>
             <a:fld id="{FCE35322-EB9C-4947-815B-864C51DCC349}" type="datetimeFigureOut">
               <a:rPr kumimoji="1" lang="ja-JP" altLang="en-US" smtClean="0"/>
-              <a:t>2026/4/1</a:t>
+              <a:t>2026/4/5</a:t>
             </a:fld>
             <a:endParaRPr kumimoji="1" lang="ja-JP" altLang="en-US"/>
           </a:p>
@@ -806,7 +806,7 @@
           <a:p>
             <a:fld id="{B491D25D-9672-1046-9F68-22A5AFD0674C}" type="datetimeFigureOut">
               <a:rPr kumimoji="1" lang="ja-JP" altLang="en-US" smtClean="0"/>
-              <a:t>2026/4/1</a:t>
+              <a:t>2026/4/5</a:t>
             </a:fld>
             <a:endParaRPr kumimoji="1" lang="ja-JP" altLang="en-US"/>
           </a:p>
@@ -1018,7 +1018,7 @@
           <a:p>
             <a:fld id="{B491D25D-9672-1046-9F68-22A5AFD0674C}" type="datetimeFigureOut">
               <a:rPr kumimoji="1" lang="ja-JP" altLang="en-US" smtClean="0"/>
-              <a:t>2026/4/1</a:t>
+              <a:t>2026/4/5</a:t>
             </a:fld>
             <a:endParaRPr kumimoji="1" lang="ja-JP" altLang="en-US"/>
           </a:p>
@@ -1220,7 +1220,7 @@
           <a:p>
             <a:fld id="{B491D25D-9672-1046-9F68-22A5AFD0674C}" type="datetimeFigureOut">
               <a:rPr kumimoji="1" lang="ja-JP" altLang="en-US" smtClean="0"/>
-              <a:t>2026/4/1</a:t>
+              <a:t>2026/4/5</a:t>
             </a:fld>
             <a:endParaRPr kumimoji="1" lang="ja-JP" altLang="en-US"/>
           </a:p>
@@ -1466,7 +1466,7 @@
           <a:p>
             <a:fld id="{B491D25D-9672-1046-9F68-22A5AFD0674C}" type="datetimeFigureOut">
               <a:rPr kumimoji="1" lang="ja-JP" altLang="en-US" smtClean="0"/>
-              <a:t>2026/4/1</a:t>
+              <a:t>2026/4/5</a:t>
             </a:fld>
             <a:endParaRPr kumimoji="1" lang="ja-JP" altLang="en-US"/>
           </a:p>
@@ -1762,7 +1762,7 @@
           <a:p>
             <a:fld id="{B491D25D-9672-1046-9F68-22A5AFD0674C}" type="datetimeFigureOut">
               <a:rPr kumimoji="1" lang="ja-JP" altLang="en-US" smtClean="0"/>
-              <a:t>2026/4/1</a:t>
+              <a:t>2026/4/5</a:t>
             </a:fld>
             <a:endParaRPr kumimoji="1" lang="ja-JP" altLang="en-US"/>
           </a:p>
@@ -2193,7 +2193,7 @@
           <a:p>
             <a:fld id="{B491D25D-9672-1046-9F68-22A5AFD0674C}" type="datetimeFigureOut">
               <a:rPr kumimoji="1" lang="ja-JP" altLang="en-US" smtClean="0"/>
-              <a:t>2026/4/1</a:t>
+              <a:t>2026/4/5</a:t>
             </a:fld>
             <a:endParaRPr kumimoji="1" lang="ja-JP" altLang="en-US"/>
           </a:p>
@@ -2311,7 +2311,7 @@
           <a:p>
             <a:fld id="{B491D25D-9672-1046-9F68-22A5AFD0674C}" type="datetimeFigureOut">
               <a:rPr kumimoji="1" lang="ja-JP" altLang="en-US" smtClean="0"/>
-              <a:t>2026/4/1</a:t>
+              <a:t>2026/4/5</a:t>
             </a:fld>
             <a:endParaRPr kumimoji="1" lang="ja-JP" altLang="en-US"/>
           </a:p>
@@ -2406,7 +2406,7 @@
           <a:p>
             <a:fld id="{B491D25D-9672-1046-9F68-22A5AFD0674C}" type="datetimeFigureOut">
               <a:rPr kumimoji="1" lang="ja-JP" altLang="en-US" smtClean="0"/>
-              <a:t>2026/4/1</a:t>
+              <a:t>2026/4/5</a:t>
             </a:fld>
             <a:endParaRPr kumimoji="1" lang="ja-JP" altLang="en-US"/>
           </a:p>
@@ -2715,7 +2715,7 @@
           <a:p>
             <a:fld id="{B491D25D-9672-1046-9F68-22A5AFD0674C}" type="datetimeFigureOut">
               <a:rPr kumimoji="1" lang="ja-JP" altLang="en-US" smtClean="0"/>
-              <a:t>2026/4/1</a:t>
+              <a:t>2026/4/5</a:t>
             </a:fld>
             <a:endParaRPr kumimoji="1" lang="ja-JP" altLang="en-US"/>
           </a:p>
@@ -2972,7 +2972,7 @@
           <a:p>
             <a:fld id="{B491D25D-9672-1046-9F68-22A5AFD0674C}" type="datetimeFigureOut">
               <a:rPr kumimoji="1" lang="ja-JP" altLang="en-US" smtClean="0"/>
-              <a:t>2026/4/1</a:t>
+              <a:t>2026/4/5</a:t>
             </a:fld>
             <a:endParaRPr kumimoji="1" lang="ja-JP" altLang="en-US"/>
           </a:p>
@@ -3217,7 +3217,7 @@
           <a:p>
             <a:fld id="{B491D25D-9672-1046-9F68-22A5AFD0674C}" type="datetimeFigureOut">
               <a:rPr kumimoji="1" lang="ja-JP" altLang="en-US" smtClean="0"/>
-              <a:t>2026/4/1</a:t>
+              <a:t>2026/4/5</a:t>
             </a:fld>
             <a:endParaRPr kumimoji="1" lang="ja-JP" altLang="en-US"/>
           </a:p>
@@ -3624,10 +3624,10 @@
       </p:grpSpPr>
       <p:grpSp>
         <p:nvGrpSpPr>
-          <p:cNvPr id="6" name="グループ化 5">
+          <p:cNvPr id="20" name="グループ化 19">
             <a:extLst>
               <a:ext uri="{FF2B5EF4-FFF2-40B4-BE49-F238E27FC236}">
-                <a16:creationId xmlns:a16="http://schemas.microsoft.com/office/drawing/2014/main" id="{C3DBB461-8801-0618-9A23-190D66F7AFE3}"/>
+                <a16:creationId xmlns:a16="http://schemas.microsoft.com/office/drawing/2014/main" id="{E0BC893D-F894-D85A-5B92-BD6406AF02EE}"/>
               </a:ext>
             </a:extLst>
           </p:cNvPr>
@@ -3636,18 +3636,18 @@
         </p:nvGrpSpPr>
         <p:grpSpPr>
           <a:xfrm>
-            <a:off x="-1093703" y="-604364"/>
-            <a:ext cx="14380994" cy="6323220"/>
-            <a:chOff x="-1093703" y="-604364"/>
-            <a:chExt cx="14380994" cy="6323220"/>
+            <a:off x="-1093703" y="-97536"/>
+            <a:ext cx="14380994" cy="5855560"/>
+            <a:chOff x="-1093703" y="-97536"/>
+            <a:chExt cx="14380994" cy="5855560"/>
           </a:xfrm>
         </p:grpSpPr>
         <p:grpSp>
           <p:nvGrpSpPr>
-            <p:cNvPr id="7" name="グループ化 6">
+            <p:cNvPr id="21" name="グループ化 20">
               <a:extLst>
                 <a:ext uri="{FF2B5EF4-FFF2-40B4-BE49-F238E27FC236}">
-                  <a16:creationId xmlns:a16="http://schemas.microsoft.com/office/drawing/2014/main" id="{B385577A-AC7D-AA12-C1E6-CEC84CD31DB0}"/>
+                  <a16:creationId xmlns:a16="http://schemas.microsoft.com/office/drawing/2014/main" id="{FFE6F719-7F5F-2352-D4A3-588E98177CDF}"/>
                 </a:ext>
               </a:extLst>
             </p:cNvPr>
@@ -3656,18 +3656,18 @@
           </p:nvGrpSpPr>
           <p:grpSpPr>
             <a:xfrm>
-              <a:off x="-1093703" y="-604364"/>
+              <a:off x="-1093703" y="54004"/>
               <a:ext cx="14380994" cy="5323321"/>
-              <a:chOff x="126847" y="-277794"/>
-              <a:chExt cx="11810931" cy="4371977"/>
+              <a:chOff x="-1093703" y="-555596"/>
+              <a:chExt cx="14380994" cy="5323321"/>
             </a:xfrm>
           </p:grpSpPr>
           <p:pic>
             <p:nvPicPr>
-              <p:cNvPr id="11" name="グラフィックス 10">
+              <p:cNvPr id="26" name="グラフィックス 25">
                 <a:extLst>
                   <a:ext uri="{FF2B5EF4-FFF2-40B4-BE49-F238E27FC236}">
-                    <a16:creationId xmlns:a16="http://schemas.microsoft.com/office/drawing/2014/main" id="{88570139-2304-239C-58F0-B62C1B8969E8}"/>
+                    <a16:creationId xmlns:a16="http://schemas.microsoft.com/office/drawing/2014/main" id="{9303B62D-AEB8-8B30-5656-A8792580D7EE}"/>
                   </a:ext>
                 </a:extLst>
               </p:cNvPr>
@@ -3690,8 +3690,8 @@
             </p:blipFill>
             <p:spPr>
               <a:xfrm>
-                <a:off x="126847" y="-277793"/>
-                <a:ext cx="7772400" cy="4371975"/>
+                <a:off x="-1093703" y="-555595"/>
+                <a:ext cx="9463677" cy="5323319"/>
               </a:xfrm>
               <a:prstGeom prst="rect">
                 <a:avLst/>
@@ -3700,10 +3700,10 @@
           </p:pic>
           <p:pic>
             <p:nvPicPr>
-              <p:cNvPr id="12" name="グラフィックス 11">
+              <p:cNvPr id="27" name="グラフィックス 26">
                 <a:extLst>
                   <a:ext uri="{FF2B5EF4-FFF2-40B4-BE49-F238E27FC236}">
-                    <a16:creationId xmlns:a16="http://schemas.microsoft.com/office/drawing/2014/main" id="{CC08FF95-4AD0-950A-0AD8-D41519B59098}"/>
+                    <a16:creationId xmlns:a16="http://schemas.microsoft.com/office/drawing/2014/main" id="{EE3920C8-3317-A6BD-0C67-AAF2E30D58F8}"/>
                   </a:ext>
                 </a:extLst>
               </p:cNvPr>
@@ -3726,8 +3726,8 @@
             </p:blipFill>
             <p:spPr>
               <a:xfrm>
-                <a:off x="4165378" y="-277794"/>
-                <a:ext cx="7772400" cy="4371975"/>
+                <a:off x="3823614" y="-555596"/>
+                <a:ext cx="9463677" cy="5323319"/>
               </a:xfrm>
               <a:prstGeom prst="rect">
                 <a:avLst/>
@@ -3736,10 +3736,10 @@
           </p:pic>
           <p:pic>
             <p:nvPicPr>
-              <p:cNvPr id="13" name="グラフィックス 12">
+              <p:cNvPr id="28" name="グラフィックス 27">
                 <a:extLst>
                   <a:ext uri="{FF2B5EF4-FFF2-40B4-BE49-F238E27FC236}">
-                    <a16:creationId xmlns:a16="http://schemas.microsoft.com/office/drawing/2014/main" id="{87A086CE-90C9-CD37-0C86-720E8DA36372}"/>
+                    <a16:creationId xmlns:a16="http://schemas.microsoft.com/office/drawing/2014/main" id="{98B95BE5-5E4C-C48B-410E-1E336A70611B}"/>
                   </a:ext>
                 </a:extLst>
               </p:cNvPr>
@@ -3762,8 +3762,8 @@
             </p:blipFill>
             <p:spPr>
               <a:xfrm>
-                <a:off x="2243252" y="-277792"/>
-                <a:ext cx="7772400" cy="4371975"/>
+                <a:off x="1483233" y="-555594"/>
+                <a:ext cx="9463677" cy="5323319"/>
               </a:xfrm>
               <a:prstGeom prst="rect">
                 <a:avLst/>
@@ -3773,10 +3773,10 @@
         </p:grpSp>
         <p:pic>
           <p:nvPicPr>
-            <p:cNvPr id="8" name="グラフィックス 7">
+            <p:cNvPr id="22" name="グラフィックス 21">
               <a:extLst>
                 <a:ext uri="{FF2B5EF4-FFF2-40B4-BE49-F238E27FC236}">
-                  <a16:creationId xmlns:a16="http://schemas.microsoft.com/office/drawing/2014/main" id="{9F78D935-EED8-35EE-D4C2-6D9265445555}"/>
+                  <a16:creationId xmlns:a16="http://schemas.microsoft.com/office/drawing/2014/main" id="{0B8D38B2-3B1E-58E8-DCC0-2434F435058F}"/>
                 </a:ext>
               </a:extLst>
             </p:cNvPr>
@@ -3799,8 +3799,8 @@
           </p:blipFill>
           <p:spPr>
             <a:xfrm>
-              <a:off x="2019678" y="2481943"/>
-              <a:ext cx="3236913" cy="3236913"/>
+              <a:off x="2378292" y="2949670"/>
+              <a:ext cx="2808354" cy="2808354"/>
             </a:xfrm>
             <a:prstGeom prst="rect">
               <a:avLst/>
@@ -3809,10 +3809,10 @@
         </p:pic>
         <p:pic>
           <p:nvPicPr>
-            <p:cNvPr id="9" name="グラフィックス 8">
+            <p:cNvPr id="23" name="グラフィックス 22">
               <a:extLst>
                 <a:ext uri="{FF2B5EF4-FFF2-40B4-BE49-F238E27FC236}">
-                  <a16:creationId xmlns:a16="http://schemas.microsoft.com/office/drawing/2014/main" id="{0BE067FC-27AC-658D-4291-989CCBBD102D}"/>
+                  <a16:creationId xmlns:a16="http://schemas.microsoft.com/office/drawing/2014/main" id="{DF197ED8-D00A-9042-2229-227DDF73F894}"/>
                 </a:ext>
               </a:extLst>
             </p:cNvPr>
@@ -3835,8 +3835,8 @@
           </p:blipFill>
           <p:spPr>
             <a:xfrm>
-              <a:off x="7062738" y="2481942"/>
-              <a:ext cx="3236914" cy="3236914"/>
+              <a:off x="7006942" y="2949670"/>
+              <a:ext cx="2808354" cy="2808354"/>
             </a:xfrm>
             <a:prstGeom prst="rect">
               <a:avLst/>
@@ -3845,10 +3845,10 @@
         </p:pic>
         <p:sp>
           <p:nvSpPr>
-            <p:cNvPr id="10" name="右矢印 9">
+            <p:cNvPr id="24" name="右矢印 23">
               <a:extLst>
                 <a:ext uri="{FF2B5EF4-FFF2-40B4-BE49-F238E27FC236}">
-                  <a16:creationId xmlns:a16="http://schemas.microsoft.com/office/drawing/2014/main" id="{0E294E25-C169-96E0-770B-4B0CD127BA2C}"/>
+                  <a16:creationId xmlns:a16="http://schemas.microsoft.com/office/drawing/2014/main" id="{E80045EA-B6FC-1F1F-6816-F43D4A004865}"/>
                 </a:ext>
               </a:extLst>
             </p:cNvPr>
@@ -3857,7 +3857,7 @@
           </p:nvSpPr>
           <p:spPr>
             <a:xfrm>
-              <a:off x="5561323" y="3659528"/>
+              <a:off x="5561620" y="4010512"/>
               <a:ext cx="1307495" cy="881742"/>
             </a:xfrm>
             <a:prstGeom prst="rightArrow">
@@ -3903,6 +3903,42 @@
             </a:p>
           </p:txBody>
         </p:sp>
+        <p:pic>
+          <p:nvPicPr>
+            <p:cNvPr id="25" name="グラフィックス 24">
+              <a:extLst>
+                <a:ext uri="{FF2B5EF4-FFF2-40B4-BE49-F238E27FC236}">
+                  <a16:creationId xmlns:a16="http://schemas.microsoft.com/office/drawing/2014/main" id="{CEDB0BDC-B8E7-1024-277D-96BD5882E1A2}"/>
+                </a:ext>
+              </a:extLst>
+            </p:cNvPr>
+            <p:cNvPicPr>
+              <a:picLocks noChangeAspect="1"/>
+            </p:cNvPicPr>
+            <p:nvPr/>
+          </p:nvPicPr>
+          <p:blipFill>
+            <a:blip>
+              <a:extLst>
+                <a:ext uri="{96DAC541-7B7A-43D3-8B79-37D633B846F1}">
+                  <asvg:svgBlip xmlns:asvg="http://schemas.microsoft.com/office/drawing/2016/SVG/main" r:embed="rId7"/>
+                </a:ext>
+              </a:extLst>
+            </a:blip>
+            <a:stretch>
+              <a:fillRect/>
+            </a:stretch>
+          </p:blipFill>
+          <p:spPr>
+            <a:xfrm>
+              <a:off x="365664" y="-97536"/>
+              <a:ext cx="4942702" cy="2780270"/>
+            </a:xfrm>
+            <a:prstGeom prst="rect">
+              <a:avLst/>
+            </a:prstGeom>
+          </p:spPr>
+        </p:pic>
       </p:grpSp>
     </p:spTree>
     <p:extLst>
@@ -3942,10 +3978,10 @@
       </p:grpSpPr>
       <p:grpSp>
         <p:nvGrpSpPr>
-          <p:cNvPr id="2" name="グループ化 1">
+          <p:cNvPr id="11" name="グループ化 10">
             <a:extLst>
               <a:ext uri="{FF2B5EF4-FFF2-40B4-BE49-F238E27FC236}">
-                <a16:creationId xmlns:a16="http://schemas.microsoft.com/office/drawing/2014/main" id="{4BD4A0BD-5D26-500C-32F4-85786A15EF93}"/>
+                <a16:creationId xmlns:a16="http://schemas.microsoft.com/office/drawing/2014/main" id="{9D4ADC1A-2A86-EF75-1F27-E3DDF6E42CAA}"/>
               </a:ext>
             </a:extLst>
           </p:cNvPr>
@@ -3954,18 +3990,18 @@
         </p:nvGrpSpPr>
         <p:grpSpPr>
           <a:xfrm>
-            <a:off x="-1093703" y="-604364"/>
-            <a:ext cx="14380994" cy="6323220"/>
-            <a:chOff x="-1093703" y="-604364"/>
-            <a:chExt cx="14380994" cy="6323220"/>
+            <a:off x="-1093703" y="-97536"/>
+            <a:ext cx="14380994" cy="5855560"/>
+            <a:chOff x="-1093703" y="-97536"/>
+            <a:chExt cx="14380994" cy="5855560"/>
           </a:xfrm>
         </p:grpSpPr>
         <p:grpSp>
           <p:nvGrpSpPr>
-            <p:cNvPr id="3" name="グループ化 2">
+            <p:cNvPr id="13" name="グループ化 12">
               <a:extLst>
                 <a:ext uri="{FF2B5EF4-FFF2-40B4-BE49-F238E27FC236}">
-                  <a16:creationId xmlns:a16="http://schemas.microsoft.com/office/drawing/2014/main" id="{0BD60D67-818E-329C-1E25-7E8CFDC598F0}"/>
+                  <a16:creationId xmlns:a16="http://schemas.microsoft.com/office/drawing/2014/main" id="{70C0BB87-B107-7B99-343A-E2DF783ABC86}"/>
                 </a:ext>
               </a:extLst>
             </p:cNvPr>
@@ -3974,18 +4010,18 @@
           </p:nvGrpSpPr>
           <p:grpSpPr>
             <a:xfrm>
-              <a:off x="-1093703" y="-604364"/>
+              <a:off x="-1093703" y="54004"/>
               <a:ext cx="14380994" cy="5323321"/>
-              <a:chOff x="126847" y="-277794"/>
-              <a:chExt cx="11810931" cy="4371977"/>
+              <a:chOff x="-1093703" y="-555596"/>
+              <a:chExt cx="14380994" cy="5323321"/>
             </a:xfrm>
           </p:grpSpPr>
           <p:pic>
             <p:nvPicPr>
-              <p:cNvPr id="7" name="グラフィックス 6">
+              <p:cNvPr id="19" name="グラフィックス 18">
                 <a:extLst>
                   <a:ext uri="{FF2B5EF4-FFF2-40B4-BE49-F238E27FC236}">
-                    <a16:creationId xmlns:a16="http://schemas.microsoft.com/office/drawing/2014/main" id="{44932BEF-5A24-0215-1C57-11AED9E106D9}"/>
+                    <a16:creationId xmlns:a16="http://schemas.microsoft.com/office/drawing/2014/main" id="{11254966-648C-ABE2-B7FD-94F2D84BA9A7}"/>
                   </a:ext>
                 </a:extLst>
               </p:cNvPr>
@@ -4008,8 +4044,8 @@
             </p:blipFill>
             <p:spPr>
               <a:xfrm>
-                <a:off x="126847" y="-277793"/>
-                <a:ext cx="7772400" cy="4371975"/>
+                <a:off x="-1093703" y="-555595"/>
+                <a:ext cx="9463677" cy="5323319"/>
               </a:xfrm>
               <a:prstGeom prst="rect">
                 <a:avLst/>
@@ -4018,10 +4054,10 @@
           </p:pic>
           <p:pic>
             <p:nvPicPr>
-              <p:cNvPr id="12" name="グラフィックス 11">
+              <p:cNvPr id="20" name="グラフィックス 19">
                 <a:extLst>
                   <a:ext uri="{FF2B5EF4-FFF2-40B4-BE49-F238E27FC236}">
-                    <a16:creationId xmlns:a16="http://schemas.microsoft.com/office/drawing/2014/main" id="{1604D7DB-6BFF-A25F-F4B9-FCAD8D2EE964}"/>
+                    <a16:creationId xmlns:a16="http://schemas.microsoft.com/office/drawing/2014/main" id="{362AA37C-A1FF-237E-3406-02AFB2BEAF16}"/>
                   </a:ext>
                 </a:extLst>
               </p:cNvPr>
@@ -4044,8 +4080,8 @@
             </p:blipFill>
             <p:spPr>
               <a:xfrm>
-                <a:off x="4165378" y="-277794"/>
-                <a:ext cx="7772400" cy="4371975"/>
+                <a:off x="3823614" y="-555596"/>
+                <a:ext cx="9463677" cy="5323319"/>
               </a:xfrm>
               <a:prstGeom prst="rect">
                 <a:avLst/>
@@ -4054,10 +4090,10 @@
           </p:pic>
           <p:pic>
             <p:nvPicPr>
-              <p:cNvPr id="14" name="グラフィックス 13">
+              <p:cNvPr id="21" name="グラフィックス 20">
                 <a:extLst>
                   <a:ext uri="{FF2B5EF4-FFF2-40B4-BE49-F238E27FC236}">
-                    <a16:creationId xmlns:a16="http://schemas.microsoft.com/office/drawing/2014/main" id="{5DD1A650-88AB-6688-99E6-79D382B64FB6}"/>
+                    <a16:creationId xmlns:a16="http://schemas.microsoft.com/office/drawing/2014/main" id="{8222D32B-C660-9964-86CA-D3147A800FFB}"/>
                   </a:ext>
                 </a:extLst>
               </p:cNvPr>
@@ -4080,8 +4116,8 @@
             </p:blipFill>
             <p:spPr>
               <a:xfrm>
-                <a:off x="2243252" y="-277792"/>
-                <a:ext cx="7772400" cy="4371975"/>
+                <a:off x="1483233" y="-555594"/>
+                <a:ext cx="9463677" cy="5323319"/>
               </a:xfrm>
               <a:prstGeom prst="rect">
                 <a:avLst/>
@@ -4091,10 +4127,10 @@
         </p:grpSp>
         <p:pic>
           <p:nvPicPr>
-            <p:cNvPr id="4" name="グラフィックス 3">
+            <p:cNvPr id="15" name="グラフィックス 14">
               <a:extLst>
                 <a:ext uri="{FF2B5EF4-FFF2-40B4-BE49-F238E27FC236}">
-                  <a16:creationId xmlns:a16="http://schemas.microsoft.com/office/drawing/2014/main" id="{DA420A4D-69E2-7626-1C34-3CC6BB671D33}"/>
+                  <a16:creationId xmlns:a16="http://schemas.microsoft.com/office/drawing/2014/main" id="{013760F0-4CD9-2D8F-734C-CC6C72AD2368}"/>
                 </a:ext>
               </a:extLst>
             </p:cNvPr>
@@ -4117,8 +4153,8 @@
           </p:blipFill>
           <p:spPr>
             <a:xfrm>
-              <a:off x="2019678" y="2481943"/>
-              <a:ext cx="3236913" cy="3236913"/>
+              <a:off x="2378292" y="2949670"/>
+              <a:ext cx="2808354" cy="2808354"/>
             </a:xfrm>
             <a:prstGeom prst="rect">
               <a:avLst/>
@@ -4127,10 +4163,10 @@
         </p:pic>
         <p:pic>
           <p:nvPicPr>
-            <p:cNvPr id="5" name="グラフィックス 4">
+            <p:cNvPr id="16" name="グラフィックス 15">
               <a:extLst>
                 <a:ext uri="{FF2B5EF4-FFF2-40B4-BE49-F238E27FC236}">
-                  <a16:creationId xmlns:a16="http://schemas.microsoft.com/office/drawing/2014/main" id="{50961BFF-282B-6D11-14EA-3F85F240DB00}"/>
+                  <a16:creationId xmlns:a16="http://schemas.microsoft.com/office/drawing/2014/main" id="{380A30D1-2A77-C09B-7D96-876C12F51699}"/>
                 </a:ext>
               </a:extLst>
             </p:cNvPr>
@@ -4153,8 +4189,8 @@
           </p:blipFill>
           <p:spPr>
             <a:xfrm>
-              <a:off x="7062738" y="2481942"/>
-              <a:ext cx="3236914" cy="3236914"/>
+              <a:off x="7006942" y="2949670"/>
+              <a:ext cx="2808354" cy="2808354"/>
             </a:xfrm>
             <a:prstGeom prst="rect">
               <a:avLst/>
@@ -4163,10 +4199,10 @@
         </p:pic>
         <p:sp>
           <p:nvSpPr>
-            <p:cNvPr id="6" name="右矢印 5">
+            <p:cNvPr id="17" name="右矢印 16">
               <a:extLst>
                 <a:ext uri="{FF2B5EF4-FFF2-40B4-BE49-F238E27FC236}">
-                  <a16:creationId xmlns:a16="http://schemas.microsoft.com/office/drawing/2014/main" id="{623846A2-6154-1631-59D7-52C01B2C2A7E}"/>
+                  <a16:creationId xmlns:a16="http://schemas.microsoft.com/office/drawing/2014/main" id="{E5876A28-24E3-AC6D-714C-D3FBA43331D1}"/>
                 </a:ext>
               </a:extLst>
             </p:cNvPr>
@@ -4175,7 +4211,7 @@
           </p:nvSpPr>
           <p:spPr>
             <a:xfrm>
-              <a:off x="5561323" y="3659528"/>
+              <a:off x="5561620" y="4010512"/>
               <a:ext cx="1307495" cy="881742"/>
             </a:xfrm>
             <a:prstGeom prst="rightArrow">
@@ -4221,6 +4257,42 @@
             </a:p>
           </p:txBody>
         </p:sp>
+        <p:pic>
+          <p:nvPicPr>
+            <p:cNvPr id="18" name="グラフィックス 17">
+              <a:extLst>
+                <a:ext uri="{FF2B5EF4-FFF2-40B4-BE49-F238E27FC236}">
+                  <a16:creationId xmlns:a16="http://schemas.microsoft.com/office/drawing/2014/main" id="{B9884C70-CF42-3ED7-1862-CEFA63E636E2}"/>
+                </a:ext>
+              </a:extLst>
+            </p:cNvPr>
+            <p:cNvPicPr>
+              <a:picLocks noChangeAspect="1"/>
+            </p:cNvPicPr>
+            <p:nvPr/>
+          </p:nvPicPr>
+          <p:blipFill>
+            <a:blip>
+              <a:extLst>
+                <a:ext uri="{96DAC541-7B7A-43D3-8B79-37D633B846F1}">
+                  <asvg:svgBlip xmlns:asvg="http://schemas.microsoft.com/office/drawing/2016/SVG/main" r:embed="rId8"/>
+                </a:ext>
+              </a:extLst>
+            </a:blip>
+            <a:stretch>
+              <a:fillRect/>
+            </a:stretch>
+          </p:blipFill>
+          <p:spPr>
+            <a:xfrm>
+              <a:off x="365664" y="-97536"/>
+              <a:ext cx="4942702" cy="2780270"/>
+            </a:xfrm>
+            <a:prstGeom prst="rect">
+              <a:avLst/>
+            </a:prstGeom>
+          </p:spPr>
+        </p:pic>
       </p:grpSp>
     </p:spTree>
     <p:extLst>
